--- a/Week06/MoreSelectors.pptx
+++ b/Week06/MoreSelectors.pptx
@@ -5983,7 +5983,7 @@
           <a:p>
             <a:fld id="{5958763E-B898-436D-883D-03711491D54A}" type="datetimeFigureOut">
               <a:rPr lang="en-US" smtClean="0"/>
-              <a:t>9/4/2024</a:t>
+              <a:t>8/27/2026</a:t>
             </a:fld>
             <a:endParaRPr lang="en-US"/>
           </a:p>
@@ -8126,7 +8126,7 @@
               <a:rPr lang="en-US" sz="1800" dirty="0">
                 <a:hlinkClick r:id="rId3"/>
               </a:rPr>
-              <a:t>https://jsfiddle.net/46u2vtxs/</a:t>
+              <a:t>https://hytop.onrender.com/e/css-descendant-selector</a:t>
             </a:r>
             <a:endParaRPr lang="en-US" sz="1800" dirty="0"/>
           </a:p>
@@ -10549,7 +10549,7 @@
               <a:rPr lang="en-US" sz="2000" dirty="0">
                 <a:hlinkClick r:id="rId3"/>
               </a:rPr>
-              <a:t>https://jsfiddle.net/rs9qe04L/</a:t>
+              <a:t>https://hytop.onrender.com/e/css-class-selector-example</a:t>
             </a:r>
             <a:endParaRPr lang="en-US" sz="2800" dirty="0"/>
           </a:p>
@@ -11296,7 +11296,7 @@
               <a:rPr lang="en-US" sz="2000" dirty="0">
                 <a:hlinkClick r:id="rId3"/>
               </a:rPr>
-              <a:t>https://jsfiddle.net/uk6b49ws/</a:t>
+              <a:t>https://hytop.onrender.com/e/css-id-selector-example</a:t>
             </a:r>
             <a:endParaRPr lang="en-US" sz="2000" dirty="0"/>
           </a:p>
